--- a/Slides/3_SQL_Fundamentals_Database_Concepts.pptx
+++ b/Slides/3_SQL_Fundamentals_Database_Concepts.pptx
@@ -14280,7 +14280,7 @@
         </p:nvSpPr>
         <p:spPr>
           <a:xfrm>
-            <a:off x="457200" y="969264"/>
+            <a:off x="457200" y="957232"/>
             <a:ext cx="8229600" cy="621792"/>
           </a:xfrm>
           <a:prstGeom prst="rect">
@@ -14304,7 +14304,7 @@
           <a:bodyPr/>
           <a:lstStyle/>
           <a:p>
-            <a:endParaRPr lang="en-US"/>
+            <a:endParaRPr lang="en-US" dirty="0"/>
           </a:p>
         </p:txBody>
       </p:sp>
@@ -14365,65 +14365,54 @@
               <a:buNone/>
             </a:pPr>
             <a:r>
-              <a:rPr lang="en-US" sz="1050" b="1" dirty="0">
-                <a:solidFill>
-                  <a:srgbClr val="059669"/>
+              <a:rPr lang="en-US" sz="1050" dirty="0">
+                <a:solidFill>
+                  <a:srgbClr val="334155"/>
                 </a:solidFill>
                 <a:latin typeface="Calibri" pitchFamily="34" charset="0"/>
                 <a:ea typeface="Calibri" pitchFamily="34" charset="-122"/>
                 <a:cs typeface="Calibri" pitchFamily="34" charset="-120"/>
               </a:rPr>
-              <a:t>Yes — exactly as you said. </a:t>
-            </a:r>
-            <a:r>
-              <a:rPr lang="en-US" sz="1050" dirty="0">
-                <a:solidFill>
-                  <a:srgbClr val="334155"/>
+              <a:t>A candidate key is a super key with NO extra columns. Remove any one column and it immediately stops being unique. Only these qualify as candidates for the Primary Key.</a:t>
+            </a:r>
+            <a:endParaRPr lang="en-US" sz="1050" dirty="0"/>
+          </a:p>
+        </p:txBody>
+      </p:sp>
+      <p:sp>
+        <p:nvSpPr>
+          <p:cNvPr id="7" name="Text 5"/>
+          <p:cNvSpPr/>
+          <p:nvPr/>
+        </p:nvSpPr>
+        <p:spPr>
+          <a:xfrm>
+            <a:off x="603504" y="1261872"/>
+            <a:ext cx="7955280" cy="274320"/>
+          </a:xfrm>
+          <a:prstGeom prst="rect">
+            <a:avLst/>
+          </a:prstGeom>
+          <a:noFill/>
+          <a:ln/>
+        </p:spPr>
+        <p:txBody>
+          <a:bodyPr wrap="square" lIns="0" tIns="0" rIns="0" bIns="0" rtlCol="0" anchor="ctr"/>
+          <a:lstStyle/>
+          <a:p>
+            <a:pPr marL="0" indent="0">
+              <a:buNone/>
+            </a:pPr>
+            <a:r>
+              <a:rPr lang="en-US" sz="950" b="1" dirty="0">
+                <a:solidFill>
+                  <a:srgbClr val="059669"/>
                 </a:solidFill>
                 <a:latin typeface="Calibri" pitchFamily="34" charset="0"/>
                 <a:ea typeface="Calibri" pitchFamily="34" charset="-122"/>
                 <a:cs typeface="Calibri" pitchFamily="34" charset="-120"/>
               </a:rPr>
-              <a:t>A candidate key is a super key with NO extra columns. Remove any one column and it immediately stops being unique. Only these qualify as candidates for the Primary Key.</a:t>
-            </a:r>
-            <a:endParaRPr lang="en-US" sz="1050" dirty="0"/>
-          </a:p>
-        </p:txBody>
-      </p:sp>
-      <p:sp>
-        <p:nvSpPr>
-          <p:cNvPr id="7" name="Text 5"/>
-          <p:cNvSpPr/>
-          <p:nvPr/>
-        </p:nvSpPr>
-        <p:spPr>
-          <a:xfrm>
-            <a:off x="603504" y="1261872"/>
-            <a:ext cx="7955280" cy="274320"/>
-          </a:xfrm>
-          <a:prstGeom prst="rect">
-            <a:avLst/>
-          </a:prstGeom>
-          <a:noFill/>
-          <a:ln/>
-        </p:spPr>
-        <p:txBody>
-          <a:bodyPr wrap="square" lIns="0" tIns="0" rIns="0" bIns="0" rtlCol="0" anchor="ctr"/>
-          <a:lstStyle/>
-          <a:p>
-            <a:pPr marL="0" indent="0">
-              <a:buNone/>
-            </a:pPr>
-            <a:r>
-              <a:rPr lang="en-US" sz="950" b="1" dirty="0">
-                <a:solidFill>
-                  <a:srgbClr val="059669"/>
-                </a:solidFill>
-                <a:latin typeface="Calibri" pitchFamily="34" charset="0"/>
-                <a:ea typeface="Calibri" pitchFamily="34" charset="-122"/>
-                <a:cs typeface="Calibri" pitchFamily="34" charset="-120"/>
-              </a:rPr>
-              <a:t>One-line rule: Can I remove any column and still uniquely identify every row?  NO → it is a candidate key.  YES → it is not.</a:t>
+              <a:t>.</a:t>
             </a:r>
             <a:endParaRPr lang="en-US" sz="950" dirty="0"/>
           </a:p>
@@ -19535,7 +19524,7 @@
         <p:spPr>
           <a:xfrm>
             <a:off x="4864608" y="3547872"/>
-            <a:ext cx="3712464" cy="621792"/>
+            <a:ext cx="3712464" cy="749808"/>
           </a:xfrm>
           <a:prstGeom prst="rect">
             <a:avLst/>
@@ -19605,8 +19594,8 @@
         </p:nvSpPr>
         <p:spPr>
           <a:xfrm>
-            <a:off x="4974336" y="3749040"/>
-            <a:ext cx="3493008" cy="182880"/>
+            <a:off x="4974336" y="3774186"/>
+            <a:ext cx="3493008" cy="388620"/>
           </a:xfrm>
           <a:prstGeom prst="rect">
             <a:avLst/>
@@ -19618,9 +19607,6 @@
           <a:bodyPr wrap="square" lIns="0" tIns="0" rIns="0" bIns="0" rtlCol="0" anchor="ctr"/>
           <a:lstStyle/>
           <a:p>
-            <a:pPr marL="0" indent="0">
-              <a:buNone/>
-            </a:pPr>
             <a:r>
               <a:rPr lang="en-US" sz="900" dirty="0">
                 <a:solidFill>
@@ -19632,46 +19618,71 @@
               </a:rPr>
               <a:t>member_sk  SERIAL PRIMARY KEY</a:t>
             </a:r>
-            <a:endParaRPr lang="en-US" sz="900" dirty="0"/>
-          </a:p>
-        </p:txBody>
-      </p:sp>
-      <p:sp>
-        <p:nvSpPr>
-          <p:cNvPr id="85" name="Text 83"/>
-          <p:cNvSpPr/>
-          <p:nvPr/>
-        </p:nvSpPr>
-        <p:spPr>
-          <a:xfrm>
-            <a:off x="4974336" y="3950208"/>
-            <a:ext cx="3493008" cy="164592"/>
-          </a:xfrm>
-          <a:prstGeom prst="rect">
-            <a:avLst/>
-          </a:prstGeom>
-          <a:noFill/>
-          <a:ln/>
-        </p:spPr>
-        <p:txBody>
-          <a:bodyPr wrap="square" lIns="0" tIns="0" rIns="0" bIns="0" rtlCol="0" anchor="ctr"/>
-          <a:lstStyle/>
-          <a:p>
-            <a:pPr marL="0" indent="0">
-              <a:buNone/>
-            </a:pPr>
-            <a:r>
-              <a:rPr lang="en-US" sz="800" dirty="0">
-                <a:solidFill>
-                  <a:srgbClr val="64748B"/>
+            <a:br>
+              <a:rPr lang="en-US" sz="900" dirty="0">
+                <a:solidFill>
+                  <a:srgbClr val="93C5FD"/>
                 </a:solidFill>
                 <a:latin typeface="Consolas" pitchFamily="34" charset="0"/>
                 <a:ea typeface="Consolas" pitchFamily="34" charset="-122"/>
                 <a:cs typeface="Consolas" pitchFamily="34" charset="-120"/>
               </a:rPr>
-              <a:t>-- BigQuery / Snowflake</a:t>
-            </a:r>
-            <a:endParaRPr lang="en-US" sz="800" dirty="0"/>
+            </a:br>
+            <a:r>
+              <a:rPr lang="en-US" sz="900" dirty="0" err="1">
+                <a:solidFill>
+                  <a:srgbClr val="93C5FD"/>
+                </a:solidFill>
+                <a:latin typeface="Consolas" pitchFamily="34" charset="0"/>
+                <a:ea typeface="Consolas" pitchFamily="34" charset="-122"/>
+                <a:cs typeface="Consolas" pitchFamily="34" charset="-120"/>
+              </a:rPr>
+              <a:t>StudentID</a:t>
+            </a:r>
+            <a:r>
+              <a:rPr lang="en-US" sz="900" dirty="0">
+                <a:solidFill>
+                  <a:srgbClr val="93C5FD"/>
+                </a:solidFill>
+                <a:latin typeface="Consolas" pitchFamily="34" charset="0"/>
+                <a:ea typeface="Consolas" pitchFamily="34" charset="-122"/>
+                <a:cs typeface="Consolas" pitchFamily="34" charset="-120"/>
+              </a:rPr>
+              <a:t> INT PRIMARY KEY IDENTITY(1,1)</a:t>
+            </a:r>
+            <a:br>
+              <a:rPr lang="en-US" sz="900" dirty="0">
+                <a:solidFill>
+                  <a:srgbClr val="93C5FD"/>
+                </a:solidFill>
+                <a:latin typeface="Consolas" pitchFamily="34" charset="0"/>
+                <a:ea typeface="Consolas" pitchFamily="34" charset="-122"/>
+                <a:cs typeface="Consolas" pitchFamily="34" charset="-120"/>
+              </a:rPr>
+            </a:br>
+            <a:r>
+              <a:rPr lang="en-US" sz="900" dirty="0" err="1">
+                <a:solidFill>
+                  <a:srgbClr val="93C5FD"/>
+                </a:solidFill>
+                <a:latin typeface="Consolas" pitchFamily="34" charset="0"/>
+                <a:ea typeface="Consolas" pitchFamily="34" charset="-122"/>
+                <a:cs typeface="Consolas" pitchFamily="34" charset="-120"/>
+              </a:rPr>
+              <a:t>StudentID</a:t>
+            </a:r>
+            <a:r>
+              <a:rPr lang="en-US" sz="900" dirty="0">
+                <a:solidFill>
+                  <a:srgbClr val="93C5FD"/>
+                </a:solidFill>
+                <a:latin typeface="Consolas" pitchFamily="34" charset="0"/>
+                <a:ea typeface="Consolas" pitchFamily="34" charset="-122"/>
+                <a:cs typeface="Consolas" pitchFamily="34" charset="-120"/>
+              </a:rPr>
+              <a:t> INT GENERATED ALWAYS AS IDENTITY (START WITH 1, INCREMENT BY 1)</a:t>
+            </a:r>
+            <a:endParaRPr lang="en-US" sz="900" dirty="0"/>
           </a:p>
         </p:txBody>
       </p:sp>
@@ -26946,33 +26957,6 @@
       </p:sp>
       <p:sp>
         <p:nvSpPr>
-          <p:cNvPr id="4" name="Shape 2"/>
-          <p:cNvSpPr/>
-          <p:nvPr/>
-        </p:nvSpPr>
-        <p:spPr>
-          <a:xfrm>
-            <a:off x="457200" y="1371600"/>
-            <a:ext cx="8229600" cy="502920"/>
-          </a:xfrm>
-          <a:prstGeom prst="rect">
-            <a:avLst/>
-          </a:prstGeom>
-          <a:solidFill>
-            <a:srgbClr val="F8FAFC"/>
-          </a:solidFill>
-          <a:ln/>
-        </p:spPr>
-        <p:txBody>
-          <a:bodyPr/>
-          <a:lstStyle/>
-          <a:p>
-            <a:endParaRPr lang="en-US"/>
-          </a:p>
-        </p:txBody>
-      </p:sp>
-      <p:sp>
-        <p:nvSpPr>
           <p:cNvPr id="5" name="Text 3"/>
           <p:cNvSpPr/>
           <p:nvPr/>
@@ -30311,7 +30295,7 @@
                 <a:ea typeface="Consolas" pitchFamily="34" charset="-122"/>
                 <a:cs typeface="Consolas" pitchFamily="34" charset="-120"/>
               </a:rPr>
-              <a:t>ISNULL(phone, 'No phone')</a:t>
+              <a:t>COALESCE(phone, 'No phone')</a:t>
             </a:r>
             <a:endParaRPr lang="en-US" sz="1100" dirty="0"/>
           </a:p>
@@ -39818,7 +39802,7 @@
         <p:spPr>
           <a:xfrm>
             <a:off x="457200" y="1188720"/>
-            <a:ext cx="8229600" cy="2194560"/>
+            <a:ext cx="8229600" cy="2842260"/>
           </a:xfrm>
           <a:prstGeom prst="rect">
             <a:avLst/>
@@ -39845,7 +39829,7 @@
         <p:spPr>
           <a:xfrm>
             <a:off x="640080" y="1280160"/>
-            <a:ext cx="7863840" cy="2011680"/>
+            <a:ext cx="7863840" cy="2750820"/>
           </a:xfrm>
           <a:prstGeom prst="rect">
             <a:avLst/>
@@ -39857,157 +39841,310 @@
           <a:bodyPr wrap="square" rtlCol="0" anchor="ctr"/>
           <a:lstStyle/>
           <a:p>
-            <a:pPr marL="0" indent="0">
-              <a:buNone/>
-            </a:pPr>
-            <a:r>
-              <a:rPr lang="en-US" sz="1300" dirty="0">
-                <a:solidFill>
-                  <a:srgbClr val="FFFFFF"/>
-                </a:solidFill>
-                <a:latin typeface="Consolas" pitchFamily="34" charset="0"/>
-                <a:ea typeface="Consolas" pitchFamily="34" charset="-122"/>
-                <a:cs typeface="Consolas" pitchFamily="34" charset="-120"/>
+            <a:r>
+              <a:rPr lang="en-US" sz="1400" dirty="0">
+                <a:solidFill>
+                  <a:schemeClr val="bg1"/>
+                </a:solidFill>
               </a:rPr>
               <a:t>SELECT </a:t>
             </a:r>
-            <a:endParaRPr lang="en-US" sz="1300" dirty="0"/>
-          </a:p>
-          <a:p>
-            <a:pPr marL="0" indent="0">
-              <a:buNone/>
-            </a:pPr>
-            <a:r>
-              <a:rPr lang="en-US" sz="1300" dirty="0">
-                <a:solidFill>
-                  <a:srgbClr val="FFFFFF"/>
-                </a:solidFill>
-                <a:latin typeface="Consolas" pitchFamily="34" charset="0"/>
-                <a:ea typeface="Consolas" pitchFamily="34" charset="-122"/>
-                <a:cs typeface="Consolas" pitchFamily="34" charset="-120"/>
-              </a:rPr>
-              <a:t>    c.city,</a:t>
-            </a:r>
-            <a:endParaRPr lang="en-US" sz="1300" dirty="0"/>
-          </a:p>
-          <a:p>
-            <a:pPr marL="0" indent="0">
-              <a:buNone/>
-            </a:pPr>
-            <a:r>
-              <a:rPr lang="en-US" sz="1300" dirty="0">
-                <a:solidFill>
-                  <a:srgbClr val="FFFFFF"/>
-                </a:solidFill>
-                <a:latin typeface="Consolas" pitchFamily="34" charset="0"/>
-                <a:ea typeface="Consolas" pitchFamily="34" charset="-122"/>
-                <a:cs typeface="Consolas" pitchFamily="34" charset="-120"/>
-              </a:rPr>
-              <a:t>    COUNT(*) as order_count,</a:t>
-            </a:r>
-            <a:endParaRPr lang="en-US" sz="1300" dirty="0"/>
-          </a:p>
-          <a:p>
-            <a:pPr marL="0" indent="0">
-              <a:buNone/>
-            </a:pPr>
-            <a:r>
-              <a:rPr lang="en-US" sz="1300" dirty="0">
-                <a:solidFill>
-                  <a:srgbClr val="FFFFFF"/>
-                </a:solidFill>
-                <a:latin typeface="Consolas" pitchFamily="34" charset="0"/>
-                <a:ea typeface="Consolas" pitchFamily="34" charset="-122"/>
-                <a:cs typeface="Consolas" pitchFamily="34" charset="-120"/>
-              </a:rPr>
-              <a:t>    SUM(o.amount) as total_sales</a:t>
-            </a:r>
-            <a:endParaRPr lang="en-US" sz="1300" dirty="0"/>
-          </a:p>
-          <a:p>
-            <a:pPr marL="0" indent="0">
-              <a:buNone/>
-            </a:pPr>
-            <a:r>
-              <a:rPr lang="en-US" sz="1300" dirty="0">
-                <a:solidFill>
-                  <a:srgbClr val="FFFFFF"/>
-                </a:solidFill>
-                <a:latin typeface="Consolas" pitchFamily="34" charset="0"/>
-                <a:ea typeface="Consolas" pitchFamily="34" charset="-122"/>
-                <a:cs typeface="Consolas" pitchFamily="34" charset="-120"/>
-              </a:rPr>
-              <a:t>FROM customers c</a:t>
-            </a:r>
-            <a:endParaRPr lang="en-US" sz="1300" dirty="0"/>
-          </a:p>
-          <a:p>
-            <a:pPr marL="0" indent="0">
-              <a:buNone/>
-            </a:pPr>
-            <a:r>
-              <a:rPr lang="en-US" sz="1300" dirty="0">
-                <a:solidFill>
-                  <a:srgbClr val="FFFFFF"/>
-                </a:solidFill>
-                <a:latin typeface="Consolas" pitchFamily="34" charset="0"/>
-                <a:ea typeface="Consolas" pitchFamily="34" charset="-122"/>
-                <a:cs typeface="Consolas" pitchFamily="34" charset="-120"/>
-              </a:rPr>
-              <a:t>INNER JOIN orders o ON c.customer_id = o.customer_id</a:t>
-            </a:r>
-            <a:endParaRPr lang="en-US" sz="1300" dirty="0"/>
-          </a:p>
-          <a:p>
-            <a:pPr marL="0" indent="0">
-              <a:buNone/>
-            </a:pPr>
-            <a:r>
-              <a:rPr lang="en-US" sz="1300" dirty="0">
-                <a:solidFill>
-                  <a:srgbClr val="FFFFFF"/>
-                </a:solidFill>
-                <a:latin typeface="Consolas" pitchFamily="34" charset="0"/>
-                <a:ea typeface="Consolas" pitchFamily="34" charset="-122"/>
-                <a:cs typeface="Consolas" pitchFamily="34" charset="-120"/>
-              </a:rPr>
-              <a:t>WHERE o.order_date &gt;= '2024-01-01'</a:t>
-            </a:r>
-            <a:endParaRPr lang="en-US" sz="1300" dirty="0"/>
-          </a:p>
-          <a:p>
-            <a:pPr marL="0" indent="0">
-              <a:buNone/>
-            </a:pPr>
-            <a:r>
-              <a:rPr lang="en-US" sz="1300" dirty="0">
-                <a:solidFill>
-                  <a:srgbClr val="FFFFFF"/>
-                </a:solidFill>
-                <a:latin typeface="Consolas" pitchFamily="34" charset="0"/>
-                <a:ea typeface="Consolas" pitchFamily="34" charset="-122"/>
-                <a:cs typeface="Consolas" pitchFamily="34" charset="-120"/>
-              </a:rPr>
-              <a:t>GROUP BY c.city</a:t>
-            </a:r>
-            <a:endParaRPr lang="en-US" sz="1300" dirty="0"/>
-          </a:p>
-          <a:p>
-            <a:pPr marL="0" indent="0">
-              <a:buNone/>
-            </a:pPr>
-            <a:r>
-              <a:rPr lang="en-US" sz="1300" dirty="0">
-                <a:solidFill>
-                  <a:srgbClr val="FFFFFF"/>
-                </a:solidFill>
-                <a:latin typeface="Consolas" pitchFamily="34" charset="0"/>
-                <a:ea typeface="Consolas" pitchFamily="34" charset="-122"/>
-                <a:cs typeface="Consolas" pitchFamily="34" charset="-120"/>
-              </a:rPr>
-              <a:t>ORDER BY total_sales DESC;</a:t>
-            </a:r>
-            <a:endParaRPr lang="en-US" sz="1300" dirty="0"/>
+          </a:p>
+          <a:p>
+            <a:r>
+              <a:rPr lang="en-US" sz="1400" dirty="0">
+                <a:solidFill>
+                  <a:schemeClr val="bg1"/>
+                </a:solidFill>
+              </a:rPr>
+              <a:t>EXTRACT(YEAR FROM </a:t>
+            </a:r>
+            <a:r>
+              <a:rPr lang="en-US" sz="1400" dirty="0" err="1">
+                <a:solidFill>
+                  <a:schemeClr val="bg1"/>
+                </a:solidFill>
+              </a:rPr>
+              <a:t>o.order_date</a:t>
+            </a:r>
+            <a:r>
+              <a:rPr lang="en-US" sz="1400" dirty="0">
+                <a:solidFill>
+                  <a:schemeClr val="bg1"/>
+                </a:solidFill>
+              </a:rPr>
+              <a:t>) AS year,</a:t>
+            </a:r>
+          </a:p>
+          <a:p>
+            <a:r>
+              <a:rPr lang="en-US" sz="1400" dirty="0">
+                <a:solidFill>
+                  <a:schemeClr val="bg1"/>
+                </a:solidFill>
+              </a:rPr>
+              <a:t>EXTRACT(MONTH FROM </a:t>
+            </a:r>
+            <a:r>
+              <a:rPr lang="en-US" sz="1400" dirty="0" err="1">
+                <a:solidFill>
+                  <a:schemeClr val="bg1"/>
+                </a:solidFill>
+              </a:rPr>
+              <a:t>o.order_date</a:t>
+            </a:r>
+            <a:r>
+              <a:rPr lang="en-US" sz="1400" dirty="0">
+                <a:solidFill>
+                  <a:schemeClr val="bg1"/>
+                </a:solidFill>
+              </a:rPr>
+              <a:t>) AS month,</a:t>
+            </a:r>
+          </a:p>
+          <a:p>
+            <a:r>
+              <a:rPr lang="en-US" sz="1400" dirty="0">
+                <a:solidFill>
+                  <a:schemeClr val="bg1"/>
+                </a:solidFill>
+              </a:rPr>
+              <a:t>COUNT(DISTINCT </a:t>
+            </a:r>
+            <a:r>
+              <a:rPr lang="en-US" sz="1400" dirty="0" err="1">
+                <a:solidFill>
+                  <a:schemeClr val="bg1"/>
+                </a:solidFill>
+              </a:rPr>
+              <a:t>o.order_id</a:t>
+            </a:r>
+            <a:r>
+              <a:rPr lang="en-US" sz="1400" dirty="0">
+                <a:solidFill>
+                  <a:schemeClr val="bg1"/>
+                </a:solidFill>
+              </a:rPr>
+              <a:t>) AS </a:t>
+            </a:r>
+            <a:r>
+              <a:rPr lang="en-US" sz="1400" dirty="0" err="1">
+                <a:solidFill>
+                  <a:schemeClr val="bg1"/>
+                </a:solidFill>
+              </a:rPr>
+              <a:t>total_orders</a:t>
+            </a:r>
+            <a:r>
+              <a:rPr lang="en-US" sz="1400" dirty="0">
+                <a:solidFill>
+                  <a:schemeClr val="bg1"/>
+                </a:solidFill>
+              </a:rPr>
+              <a:t>,</a:t>
+            </a:r>
+          </a:p>
+          <a:p>
+            <a:r>
+              <a:rPr lang="en-US" sz="1400" dirty="0">
+                <a:solidFill>
+                  <a:schemeClr val="bg1"/>
+                </a:solidFill>
+              </a:rPr>
+              <a:t>SUM(</a:t>
+            </a:r>
+            <a:r>
+              <a:rPr lang="en-US" sz="1400" dirty="0" err="1">
+                <a:solidFill>
+                  <a:schemeClr val="bg1"/>
+                </a:solidFill>
+              </a:rPr>
+              <a:t>oi.quantity</a:t>
+            </a:r>
+            <a:r>
+              <a:rPr lang="en-US" sz="1400" dirty="0">
+                <a:solidFill>
+                  <a:schemeClr val="bg1"/>
+                </a:solidFill>
+              </a:rPr>
+              <a:t> * </a:t>
+            </a:r>
+            <a:r>
+              <a:rPr lang="en-US" sz="1400" dirty="0" err="1">
+                <a:solidFill>
+                  <a:schemeClr val="bg1"/>
+                </a:solidFill>
+              </a:rPr>
+              <a:t>oi.unit_price</a:t>
+            </a:r>
+            <a:r>
+              <a:rPr lang="en-US" sz="1400" dirty="0">
+                <a:solidFill>
+                  <a:schemeClr val="bg1"/>
+                </a:solidFill>
+              </a:rPr>
+              <a:t>) AS </a:t>
+            </a:r>
+            <a:r>
+              <a:rPr lang="en-US" sz="1400" dirty="0" err="1">
+                <a:solidFill>
+                  <a:schemeClr val="bg1"/>
+                </a:solidFill>
+              </a:rPr>
+              <a:t>total_sales</a:t>
+            </a:r>
+            <a:endParaRPr lang="en-US" sz="1400" dirty="0">
+              <a:solidFill>
+                <a:schemeClr val="bg1"/>
+              </a:solidFill>
+            </a:endParaRPr>
+          </a:p>
+          <a:p>
+            <a:r>
+              <a:rPr lang="en-US" sz="1400" dirty="0">
+                <a:solidFill>
+                  <a:schemeClr val="bg1"/>
+                </a:solidFill>
+              </a:rPr>
+              <a:t>FROM orders o</a:t>
+            </a:r>
+          </a:p>
+          <a:p>
+            <a:r>
+              <a:rPr lang="en-US" sz="1400" dirty="0">
+                <a:solidFill>
+                  <a:schemeClr val="bg1"/>
+                </a:solidFill>
+              </a:rPr>
+              <a:t>JOIN </a:t>
+            </a:r>
+            <a:r>
+              <a:rPr lang="en-US" sz="1400" dirty="0" err="1">
+                <a:solidFill>
+                  <a:schemeClr val="bg1"/>
+                </a:solidFill>
+              </a:rPr>
+              <a:t>order_items</a:t>
+            </a:r>
+            <a:r>
+              <a:rPr lang="en-US" sz="1400" dirty="0">
+                <a:solidFill>
+                  <a:schemeClr val="bg1"/>
+                </a:solidFill>
+              </a:rPr>
+              <a:t> oi </a:t>
+            </a:r>
+          </a:p>
+          <a:p>
+            <a:r>
+              <a:rPr lang="en-US" sz="1400" dirty="0">
+                <a:solidFill>
+                  <a:schemeClr val="bg1"/>
+                </a:solidFill>
+              </a:rPr>
+              <a:t>ON </a:t>
+            </a:r>
+            <a:r>
+              <a:rPr lang="en-US" sz="1400" dirty="0" err="1">
+                <a:solidFill>
+                  <a:schemeClr val="bg1"/>
+                </a:solidFill>
+              </a:rPr>
+              <a:t>o.order_id</a:t>
+            </a:r>
+            <a:r>
+              <a:rPr lang="en-US" sz="1400" dirty="0">
+                <a:solidFill>
+                  <a:schemeClr val="bg1"/>
+                </a:solidFill>
+              </a:rPr>
+              <a:t> = </a:t>
+            </a:r>
+            <a:r>
+              <a:rPr lang="en-US" sz="1400" dirty="0" err="1">
+                <a:solidFill>
+                  <a:schemeClr val="bg1"/>
+                </a:solidFill>
+              </a:rPr>
+              <a:t>oi.order_id</a:t>
+            </a:r>
+            <a:endParaRPr lang="en-US" sz="1400" dirty="0">
+              <a:solidFill>
+                <a:schemeClr val="bg1"/>
+              </a:solidFill>
+            </a:endParaRPr>
+          </a:p>
+          <a:p>
+            <a:r>
+              <a:rPr lang="en-US" sz="1400" dirty="0">
+                <a:solidFill>
+                  <a:schemeClr val="bg1"/>
+                </a:solidFill>
+              </a:rPr>
+              <a:t>GROUP BY </a:t>
+            </a:r>
+          </a:p>
+          <a:p>
+            <a:r>
+              <a:rPr lang="en-US" sz="1400" dirty="0">
+                <a:solidFill>
+                  <a:schemeClr val="bg1"/>
+                </a:solidFill>
+              </a:rPr>
+              <a:t>EXTRACT(YEAR FROM </a:t>
+            </a:r>
+            <a:r>
+              <a:rPr lang="en-US" sz="1400" dirty="0" err="1">
+                <a:solidFill>
+                  <a:schemeClr val="bg1"/>
+                </a:solidFill>
+              </a:rPr>
+              <a:t>o.order_date</a:t>
+            </a:r>
+            <a:r>
+              <a:rPr lang="en-US" sz="1400" dirty="0">
+                <a:solidFill>
+                  <a:schemeClr val="bg1"/>
+                </a:solidFill>
+              </a:rPr>
+              <a:t>),</a:t>
+            </a:r>
+          </a:p>
+          <a:p>
+            <a:r>
+              <a:rPr lang="en-US" sz="1400" dirty="0">
+                <a:solidFill>
+                  <a:schemeClr val="bg1"/>
+                </a:solidFill>
+              </a:rPr>
+              <a:t>EXTRACT(MONTH FROM </a:t>
+            </a:r>
+            <a:r>
+              <a:rPr lang="en-US" sz="1400" dirty="0" err="1">
+                <a:solidFill>
+                  <a:schemeClr val="bg1"/>
+                </a:solidFill>
+              </a:rPr>
+              <a:t>o.order_date</a:t>
+            </a:r>
+            <a:r>
+              <a:rPr lang="en-US" sz="1400" dirty="0">
+                <a:solidFill>
+                  <a:schemeClr val="bg1"/>
+                </a:solidFill>
+              </a:rPr>
+              <a:t>)</a:t>
+            </a:r>
+          </a:p>
+          <a:p>
+            <a:r>
+              <a:rPr lang="en-US" sz="1400" dirty="0">
+                <a:solidFill>
+                  <a:schemeClr val="bg1"/>
+                </a:solidFill>
+              </a:rPr>
+              <a:t>ORDER BY year, month;</a:t>
+            </a:r>
           </a:p>
         </p:txBody>
       </p:sp>
@@ -40019,7 +40156,7 @@
         </p:nvSpPr>
         <p:spPr>
           <a:xfrm>
-            <a:off x="457200" y="3566160"/>
+            <a:off x="350520" y="4351020"/>
             <a:ext cx="8229600" cy="274320"/>
           </a:xfrm>
           <a:prstGeom prst="rect">
@@ -40032,9 +40169,6 @@
           <a:bodyPr wrap="square" rtlCol="0" anchor="ctr"/>
           <a:lstStyle/>
           <a:p>
-            <a:pPr marL="0" indent="0">
-              <a:buNone/>
-            </a:pPr>
             <a:r>
               <a:rPr lang="en-US" sz="1400" b="1" dirty="0">
                 <a:solidFill>
@@ -40046,114 +40180,30 @@
               </a:rPr>
               <a:t>What this does:</a:t>
             </a:r>
-            <a:endParaRPr lang="en-US" sz="1400" dirty="0"/>
-          </a:p>
-        </p:txBody>
-      </p:sp>
-      <p:sp>
-        <p:nvSpPr>
-          <p:cNvPr id="7" name="Text 5"/>
-          <p:cNvSpPr/>
-          <p:nvPr/>
-        </p:nvSpPr>
-        <p:spPr>
-          <a:xfrm>
-            <a:off x="457200" y="3886200"/>
-            <a:ext cx="8229600" cy="1097280"/>
-          </a:xfrm>
-          <a:prstGeom prst="rect">
-            <a:avLst/>
-          </a:prstGeom>
-          <a:noFill/>
-          <a:ln/>
-        </p:spPr>
-        <p:txBody>
-          <a:bodyPr wrap="square" rtlCol="0" anchor="ctr"/>
-          <a:lstStyle/>
-          <a:p>
-            <a:pPr marL="0" indent="0">
-              <a:buNone/>
-            </a:pPr>
-            <a:r>
-              <a:rPr lang="en-US" sz="1200" dirty="0">
-                <a:solidFill>
-                  <a:srgbClr val="334155"/>
+            <a:br>
+              <a:rPr lang="en-US" sz="1400" b="1" dirty="0">
+                <a:solidFill>
+                  <a:srgbClr val="1E293B"/>
                 </a:solidFill>
                 <a:latin typeface="Calibri" pitchFamily="34" charset="0"/>
                 <a:ea typeface="Calibri" pitchFamily="34" charset="-122"/>
                 <a:cs typeface="Calibri" pitchFamily="34" charset="-120"/>
               </a:rPr>
-              <a:t>1. Joins customers and orders tables</a:t>
-            </a:r>
-            <a:endParaRPr lang="en-US" sz="1200" dirty="0"/>
-          </a:p>
-          <a:p>
-            <a:pPr marL="0" indent="0">
-              <a:buNone/>
-            </a:pPr>
-            <a:r>
-              <a:rPr lang="en-US" sz="1200" dirty="0">
-                <a:solidFill>
-                  <a:srgbClr val="334155"/>
+            </a:br>
+            <a:br>
+              <a:rPr lang="en-US" sz="1400" b="1" dirty="0">
+                <a:solidFill>
+                  <a:srgbClr val="1E293B"/>
                 </a:solidFill>
                 <a:latin typeface="Calibri" pitchFamily="34" charset="0"/>
                 <a:ea typeface="Calibri" pitchFamily="34" charset="-122"/>
                 <a:cs typeface="Calibri" pitchFamily="34" charset="-120"/>
               </a:rPr>
-              <a:t>2. Filters for orders from 2024 onwards</a:t>
-            </a:r>
-            <a:endParaRPr lang="en-US" sz="1200" dirty="0"/>
-          </a:p>
-          <a:p>
-            <a:pPr marL="0" indent="0">
-              <a:buNone/>
-            </a:pPr>
-            <a:r>
-              <a:rPr lang="en-US" sz="1200" dirty="0">
-                <a:solidFill>
-                  <a:srgbClr val="334155"/>
-                </a:solidFill>
-                <a:latin typeface="Calibri" pitchFamily="34" charset="0"/>
-                <a:ea typeface="Calibri" pitchFamily="34" charset="-122"/>
-                <a:cs typeface="Calibri" pitchFamily="34" charset="-120"/>
-              </a:rPr>
-              <a:t>3. Groups by city</a:t>
-            </a:r>
-            <a:endParaRPr lang="en-US" sz="1200" dirty="0"/>
-          </a:p>
-          <a:p>
-            <a:pPr marL="0" indent="0">
-              <a:buNone/>
-            </a:pPr>
-            <a:r>
-              <a:rPr lang="en-US" sz="1200" dirty="0">
-                <a:solidFill>
-                  <a:srgbClr val="334155"/>
-                </a:solidFill>
-                <a:latin typeface="Calibri" pitchFamily="34" charset="0"/>
-                <a:ea typeface="Calibri" pitchFamily="34" charset="-122"/>
-                <a:cs typeface="Calibri" pitchFamily="34" charset="-120"/>
-              </a:rPr>
-              <a:t>4. Counts orders and sums sales per city</a:t>
-            </a:r>
-            <a:endParaRPr lang="en-US" sz="1200" dirty="0"/>
-          </a:p>
-          <a:p>
-            <a:pPr marL="0" indent="0">
-              <a:buNone/>
-            </a:pPr>
-            <a:r>
-              <a:rPr lang="en-US" sz="1200" dirty="0">
-                <a:solidFill>
-                  <a:srgbClr val="334155"/>
-                </a:solidFill>
-                <a:latin typeface="Calibri" pitchFamily="34" charset="0"/>
-                <a:ea typeface="Calibri" pitchFamily="34" charset="-122"/>
-                <a:cs typeface="Calibri" pitchFamily="34" charset="-120"/>
-              </a:rPr>
-              <a:t>5. Sorts by highest total sales first</a:t>
-            </a:r>
-            <a:endParaRPr lang="en-US" sz="1200" dirty="0"/>
+            </a:br>
+            <a:r>
+              <a:rPr lang="en-US" sz="1400" dirty="0"/>
+              <a:t>calculate the total number of orders and total sales for each month. The output should show the year, month, total orders, and total sales, sorted by year and month</a:t>
+            </a:r>
           </a:p>
         </p:txBody>
       </p:sp>
@@ -41540,19 +41590,147 @@
           <a:bodyPr wrap="square" rtlCol="0" anchor="ctr"/>
           <a:lstStyle/>
           <a:p>
-            <a:pPr marL="0" indent="0">
-              <a:buNone/>
-            </a:pPr>
             <a:r>
               <a:rPr lang="en-US" sz="1200" dirty="0">
                 <a:solidFill>
+                  <a:schemeClr val="tx1">
+                    <a:lumMod val="65000"/>
+                    <a:lumOff val="35000"/>
+                  </a:schemeClr>
+                </a:solidFill>
+              </a:rPr>
+              <a:t>Ask questions: reading data, nothing changes</a:t>
+            </a:r>
+          </a:p>
+        </p:txBody>
+      </p:sp>
+      <p:sp>
+        <p:nvSpPr>
+          <p:cNvPr id="8" name="Shape 6"/>
+          <p:cNvSpPr/>
+          <p:nvPr/>
+        </p:nvSpPr>
+        <p:spPr>
+          <a:xfrm>
+            <a:off x="5943600" y="1371600"/>
+            <a:ext cx="2743200" cy="502920"/>
+          </a:xfrm>
+          <a:prstGeom prst="rect">
+            <a:avLst/>
+          </a:prstGeom>
+          <a:solidFill>
+            <a:srgbClr val="F8FAFC"/>
+          </a:solidFill>
+          <a:ln/>
+        </p:spPr>
+        <p:txBody>
+          <a:bodyPr/>
+          <a:lstStyle/>
+          <a:p>
+            <a:endParaRPr lang="en-US"/>
+          </a:p>
+        </p:txBody>
+      </p:sp>
+      <p:sp>
+        <p:nvSpPr>
+          <p:cNvPr id="9" name="Text 7"/>
+          <p:cNvSpPr/>
+          <p:nvPr/>
+        </p:nvSpPr>
+        <p:spPr>
+          <a:xfrm>
+            <a:off x="6035040" y="1371600"/>
+            <a:ext cx="2560320" cy="502920"/>
+          </a:xfrm>
+          <a:prstGeom prst="rect">
+            <a:avLst/>
+          </a:prstGeom>
+          <a:noFill/>
+          <a:ln/>
+        </p:spPr>
+        <p:txBody>
+          <a:bodyPr wrap="square" rtlCol="0" anchor="ctr"/>
+          <a:lstStyle/>
+          <a:p>
+            <a:pPr marL="0" indent="0">
+              <a:buNone/>
+            </a:pPr>
+            <a:r>
+              <a:rPr lang="en-US" sz="1100" dirty="0">
+                <a:solidFill>
                   <a:srgbClr val="334155"/>
+                </a:solidFill>
+                <a:latin typeface="Consolas" pitchFamily="34" charset="0"/>
+                <a:ea typeface="Consolas" pitchFamily="34" charset="-122"/>
+                <a:cs typeface="Consolas" pitchFamily="34" charset="-120"/>
+              </a:rPr>
+              <a:t>SELECT</a:t>
+            </a:r>
+            <a:endParaRPr lang="en-US" sz="1100" dirty="0"/>
+          </a:p>
+        </p:txBody>
+      </p:sp>
+      <p:sp>
+        <p:nvSpPr>
+          <p:cNvPr id="10" name="Shape 8"/>
+          <p:cNvSpPr/>
+          <p:nvPr/>
+        </p:nvSpPr>
+        <p:spPr>
+          <a:xfrm>
+            <a:off x="457200" y="2029968"/>
+            <a:ext cx="731520" cy="502920"/>
+          </a:xfrm>
+          <a:prstGeom prst="rect">
+            <a:avLst/>
+          </a:prstGeom>
+          <a:solidFill>
+            <a:srgbClr val="059669"/>
+          </a:solidFill>
+          <a:ln/>
+        </p:spPr>
+        <p:txBody>
+          <a:bodyPr/>
+          <a:lstStyle/>
+          <a:p>
+            <a:endParaRPr lang="en-US"/>
+          </a:p>
+        </p:txBody>
+      </p:sp>
+      <p:sp>
+        <p:nvSpPr>
+          <p:cNvPr id="11" name="Text 9"/>
+          <p:cNvSpPr/>
+          <p:nvPr/>
+        </p:nvSpPr>
+        <p:spPr>
+          <a:xfrm>
+            <a:off x="457200" y="2029968"/>
+            <a:ext cx="731520" cy="502920"/>
+          </a:xfrm>
+          <a:prstGeom prst="rect">
+            <a:avLst/>
+          </a:prstGeom>
+          <a:noFill/>
+          <a:ln/>
+        </p:spPr>
+        <p:txBody>
+          <a:bodyPr wrap="square" rtlCol="0" anchor="ctr"/>
+          <a:lstStyle/>
+          <a:p>
+            <a:pPr marL="0" indent="0" algn="ctr">
+              <a:buNone/>
+            </a:pPr>
+            <a:r>
+              <a:rPr lang="en-US" sz="1200" b="1" dirty="0">
+                <a:solidFill>
+                  <a:srgbClr val="FFFFFF"/>
                 </a:solidFill>
                 <a:latin typeface="Calibri" pitchFamily="34" charset="0"/>
                 <a:ea typeface="Calibri" pitchFamily="34" charset="-122"/>
                 <a:cs typeface="Calibri" pitchFamily="34" charset="-120"/>
               </a:rPr>
-              <a:t>Retrieve data from database</a:t>
+              <a:t>DML</a:t>
             </a:r>
             <a:endParaRPr lang="en-US" sz="1200" dirty="0"/>
           </a:p>
@@ -41560,13 +41738,87 @@
       </p:sp>
       <p:sp>
         <p:nvSpPr>
-          <p:cNvPr id="8" name="Shape 6"/>
-          <p:cNvSpPr/>
-          <p:nvPr/>
-        </p:nvSpPr>
-        <p:spPr>
-          <a:xfrm>
-            <a:off x="5943600" y="1371600"/>
+          <p:cNvPr id="12" name="Text 10"/>
+          <p:cNvSpPr/>
+          <p:nvPr/>
+        </p:nvSpPr>
+        <p:spPr>
+          <a:xfrm>
+            <a:off x="1325880" y="2029968"/>
+            <a:ext cx="2377440" cy="502920"/>
+          </a:xfrm>
+          <a:prstGeom prst="rect">
+            <a:avLst/>
+          </a:prstGeom>
+          <a:noFill/>
+          <a:ln/>
+        </p:spPr>
+        <p:txBody>
+          <a:bodyPr wrap="square" rtlCol="0" anchor="ctr"/>
+          <a:lstStyle/>
+          <a:p>
+            <a:pPr marL="0" indent="0">
+              <a:buNone/>
+            </a:pPr>
+            <a:r>
+              <a:rPr lang="en-US" sz="1300" b="1" dirty="0">
+                <a:solidFill>
+                  <a:srgbClr val="1E293B"/>
+                </a:solidFill>
+                <a:latin typeface="Calibri" pitchFamily="34" charset="0"/>
+                <a:ea typeface="Calibri" pitchFamily="34" charset="-122"/>
+                <a:cs typeface="Calibri" pitchFamily="34" charset="-120"/>
+              </a:rPr>
+              <a:t>Data Manipulation Language</a:t>
+            </a:r>
+            <a:endParaRPr lang="en-US" sz="1300" dirty="0"/>
+          </a:p>
+        </p:txBody>
+      </p:sp>
+      <p:sp>
+        <p:nvSpPr>
+          <p:cNvPr id="13" name="Text 11"/>
+          <p:cNvSpPr/>
+          <p:nvPr/>
+        </p:nvSpPr>
+        <p:spPr>
+          <a:xfrm>
+            <a:off x="3749040" y="2029968"/>
+            <a:ext cx="2103120" cy="502920"/>
+          </a:xfrm>
+          <a:prstGeom prst="rect">
+            <a:avLst/>
+          </a:prstGeom>
+          <a:noFill/>
+          <a:ln/>
+        </p:spPr>
+        <p:txBody>
+          <a:bodyPr wrap="square" rtlCol="0" anchor="ctr"/>
+          <a:lstStyle/>
+          <a:p>
+            <a:r>
+              <a:rPr lang="en-US" sz="1200" dirty="0">
+                <a:solidFill>
+                  <a:schemeClr val="tx1">
+                    <a:lumMod val="65000"/>
+                    <a:lumOff val="35000"/>
+                  </a:schemeClr>
+                </a:solidFill>
+              </a:rPr>
+              <a:t>Change the data: the rows inside the table</a:t>
+            </a:r>
+          </a:p>
+        </p:txBody>
+      </p:sp>
+      <p:sp>
+        <p:nvSpPr>
+          <p:cNvPr id="14" name="Shape 12"/>
+          <p:cNvSpPr/>
+          <p:nvPr/>
+        </p:nvSpPr>
+        <p:spPr>
+          <a:xfrm>
+            <a:off x="5943600" y="2029968"/>
             <a:ext cx="2743200" cy="502920"/>
           </a:xfrm>
           <a:prstGeom prst="rect">
@@ -41587,13 +41839,13 @@
       </p:sp>
       <p:sp>
         <p:nvSpPr>
-          <p:cNvPr id="9" name="Text 7"/>
-          <p:cNvSpPr/>
-          <p:nvPr/>
-        </p:nvSpPr>
-        <p:spPr>
-          <a:xfrm>
-            <a:off x="6035040" y="1371600"/>
+          <p:cNvPr id="15" name="Text 13"/>
+          <p:cNvSpPr/>
+          <p:nvPr/>
+        </p:nvSpPr>
+        <p:spPr>
+          <a:xfrm>
+            <a:off x="6035040" y="2029968"/>
             <a:ext cx="2560320" cy="502920"/>
           </a:xfrm>
           <a:prstGeom prst="rect">
@@ -41618,7 +41870,7 @@
                 <a:ea typeface="Consolas" pitchFamily="34" charset="-122"/>
                 <a:cs typeface="Consolas" pitchFamily="34" charset="-120"/>
               </a:rPr>
-              <a:t>SELECT</a:t>
+              <a:t>INSERT, UPDATE, DELETE</a:t>
             </a:r>
             <a:endParaRPr lang="en-US" sz="1100" dirty="0"/>
           </a:p>
@@ -41626,20 +41878,20 @@
       </p:sp>
       <p:sp>
         <p:nvSpPr>
-          <p:cNvPr id="10" name="Shape 8"/>
-          <p:cNvSpPr/>
-          <p:nvPr/>
-        </p:nvSpPr>
-        <p:spPr>
-          <a:xfrm>
-            <a:off x="457200" y="2029968"/>
+          <p:cNvPr id="16" name="Shape 14"/>
+          <p:cNvSpPr/>
+          <p:nvPr/>
+        </p:nvSpPr>
+        <p:spPr>
+          <a:xfrm>
+            <a:off x="457200" y="2688336"/>
             <a:ext cx="731520" cy="502920"/>
           </a:xfrm>
           <a:prstGeom prst="rect">
             <a:avLst/>
           </a:prstGeom>
           <a:solidFill>
-            <a:srgbClr val="059669"/>
+            <a:srgbClr val="EA580C"/>
           </a:solidFill>
           <a:ln/>
         </p:spPr>
@@ -41653,13 +41905,13 @@
       </p:sp>
       <p:sp>
         <p:nvSpPr>
-          <p:cNvPr id="11" name="Text 9"/>
-          <p:cNvSpPr/>
-          <p:nvPr/>
-        </p:nvSpPr>
-        <p:spPr>
-          <a:xfrm>
-            <a:off x="457200" y="2029968"/>
+          <p:cNvPr id="17" name="Text 15"/>
+          <p:cNvSpPr/>
+          <p:nvPr/>
+        </p:nvSpPr>
+        <p:spPr>
+          <a:xfrm>
+            <a:off x="457200" y="2688336"/>
             <a:ext cx="731520" cy="502920"/>
           </a:xfrm>
           <a:prstGeom prst="rect">
@@ -41684,7 +41936,7 @@
                 <a:ea typeface="Calibri" pitchFamily="34" charset="-122"/>
                 <a:cs typeface="Calibri" pitchFamily="34" charset="-120"/>
               </a:rPr>
-              <a:t>DML</a:t>
+              <a:t>DDL</a:t>
             </a:r>
             <a:endParaRPr lang="en-US" sz="1200" dirty="0"/>
           </a:p>
@@ -41692,13 +41944,13 @@
       </p:sp>
       <p:sp>
         <p:nvSpPr>
-          <p:cNvPr id="12" name="Text 10"/>
-          <p:cNvSpPr/>
-          <p:nvPr/>
-        </p:nvSpPr>
-        <p:spPr>
-          <a:xfrm>
-            <a:off x="1325880" y="2029968"/>
+          <p:cNvPr id="18" name="Text 16"/>
+          <p:cNvSpPr/>
+          <p:nvPr/>
+        </p:nvSpPr>
+        <p:spPr>
+          <a:xfrm>
+            <a:off x="1325880" y="2688336"/>
             <a:ext cx="2377440" cy="502920"/>
           </a:xfrm>
           <a:prstGeom prst="rect">
@@ -41723,7 +41975,7 @@
                 <a:ea typeface="Calibri" pitchFamily="34" charset="-122"/>
                 <a:cs typeface="Calibri" pitchFamily="34" charset="-120"/>
               </a:rPr>
-              <a:t>Data Manipulation Language</a:t>
+              <a:t>Data Definition Language</a:t>
             </a:r>
             <a:endParaRPr lang="en-US" sz="1300" dirty="0"/>
           </a:p>
@@ -41731,13 +41983,13 @@
       </p:sp>
       <p:sp>
         <p:nvSpPr>
-          <p:cNvPr id="13" name="Text 11"/>
-          <p:cNvSpPr/>
-          <p:nvPr/>
-        </p:nvSpPr>
-        <p:spPr>
-          <a:xfrm>
-            <a:off x="3749040" y="2029968"/>
+          <p:cNvPr id="19" name="Text 17"/>
+          <p:cNvSpPr/>
+          <p:nvPr/>
+        </p:nvSpPr>
+        <p:spPr>
+          <a:xfrm>
+            <a:off x="3749040" y="2688336"/>
             <a:ext cx="2103120" cy="502920"/>
           </a:xfrm>
           <a:prstGeom prst="rect">
@@ -41750,19 +42002,147 @@
           <a:bodyPr wrap="square" rtlCol="0" anchor="ctr"/>
           <a:lstStyle/>
           <a:p>
-            <a:pPr marL="0" indent="0">
-              <a:buNone/>
-            </a:pPr>
             <a:r>
               <a:rPr lang="en-US" sz="1200" dirty="0">
                 <a:solidFill>
+                  <a:schemeClr val="tx1">
+                    <a:lumMod val="65000"/>
+                    <a:lumOff val="35000"/>
+                  </a:schemeClr>
+                </a:solidFill>
+              </a:rPr>
+              <a:t>Change the structure: the table itself</a:t>
+            </a:r>
+          </a:p>
+        </p:txBody>
+      </p:sp>
+      <p:sp>
+        <p:nvSpPr>
+          <p:cNvPr id="20" name="Shape 18"/>
+          <p:cNvSpPr/>
+          <p:nvPr/>
+        </p:nvSpPr>
+        <p:spPr>
+          <a:xfrm>
+            <a:off x="5943600" y="2688336"/>
+            <a:ext cx="2743200" cy="502920"/>
+          </a:xfrm>
+          <a:prstGeom prst="rect">
+            <a:avLst/>
+          </a:prstGeom>
+          <a:solidFill>
+            <a:srgbClr val="F8FAFC"/>
+          </a:solidFill>
+          <a:ln/>
+        </p:spPr>
+        <p:txBody>
+          <a:bodyPr/>
+          <a:lstStyle/>
+          <a:p>
+            <a:endParaRPr lang="en-US"/>
+          </a:p>
+        </p:txBody>
+      </p:sp>
+      <p:sp>
+        <p:nvSpPr>
+          <p:cNvPr id="21" name="Text 19"/>
+          <p:cNvSpPr/>
+          <p:nvPr/>
+        </p:nvSpPr>
+        <p:spPr>
+          <a:xfrm>
+            <a:off x="6035040" y="2688336"/>
+            <a:ext cx="2560320" cy="502920"/>
+          </a:xfrm>
+          <a:prstGeom prst="rect">
+            <a:avLst/>
+          </a:prstGeom>
+          <a:noFill/>
+          <a:ln/>
+        </p:spPr>
+        <p:txBody>
+          <a:bodyPr wrap="square" rtlCol="0" anchor="ctr"/>
+          <a:lstStyle/>
+          <a:p>
+            <a:pPr marL="0" indent="0">
+              <a:buNone/>
+            </a:pPr>
+            <a:r>
+              <a:rPr lang="en-US" sz="1100" dirty="0">
+                <a:solidFill>
                   <a:srgbClr val="334155"/>
+                </a:solidFill>
+                <a:latin typeface="Consolas" pitchFamily="34" charset="0"/>
+                <a:ea typeface="Consolas" pitchFamily="34" charset="-122"/>
+                <a:cs typeface="Consolas" pitchFamily="34" charset="-120"/>
+              </a:rPr>
+              <a:t>CREATE, ALTER, DROP, TRUNCATE</a:t>
+            </a:r>
+            <a:endParaRPr lang="en-US" sz="1100" dirty="0"/>
+          </a:p>
+        </p:txBody>
+      </p:sp>
+      <p:sp>
+        <p:nvSpPr>
+          <p:cNvPr id="22" name="Shape 20"/>
+          <p:cNvSpPr/>
+          <p:nvPr/>
+        </p:nvSpPr>
+        <p:spPr>
+          <a:xfrm>
+            <a:off x="457200" y="3346704"/>
+            <a:ext cx="731520" cy="502920"/>
+          </a:xfrm>
+          <a:prstGeom prst="rect">
+            <a:avLst/>
+          </a:prstGeom>
+          <a:solidFill>
+            <a:srgbClr val="7C3AED"/>
+          </a:solidFill>
+          <a:ln/>
+        </p:spPr>
+        <p:txBody>
+          <a:bodyPr/>
+          <a:lstStyle/>
+          <a:p>
+            <a:endParaRPr lang="en-US"/>
+          </a:p>
+        </p:txBody>
+      </p:sp>
+      <p:sp>
+        <p:nvSpPr>
+          <p:cNvPr id="23" name="Text 21"/>
+          <p:cNvSpPr/>
+          <p:nvPr/>
+        </p:nvSpPr>
+        <p:spPr>
+          <a:xfrm>
+            <a:off x="457200" y="3346704"/>
+            <a:ext cx="731520" cy="502920"/>
+          </a:xfrm>
+          <a:prstGeom prst="rect">
+            <a:avLst/>
+          </a:prstGeom>
+          <a:noFill/>
+          <a:ln/>
+        </p:spPr>
+        <p:txBody>
+          <a:bodyPr wrap="square" rtlCol="0" anchor="ctr"/>
+          <a:lstStyle/>
+          <a:p>
+            <a:pPr marL="0" indent="0" algn="ctr">
+              <a:buNone/>
+            </a:pPr>
+            <a:r>
+              <a:rPr lang="en-US" sz="1200" b="1" dirty="0">
+                <a:solidFill>
+                  <a:srgbClr val="FFFFFF"/>
                 </a:solidFill>
                 <a:latin typeface="Calibri" pitchFamily="34" charset="0"/>
                 <a:ea typeface="Calibri" pitchFamily="34" charset="-122"/>
                 <a:cs typeface="Calibri" pitchFamily="34" charset="-120"/>
               </a:rPr>
-              <a:t>Add, update, delete data</a:t>
+              <a:t>DCL</a:t>
             </a:r>
             <a:endParaRPr lang="en-US" sz="1200" dirty="0"/>
           </a:p>
@@ -41770,13 +42150,109 @@
       </p:sp>
       <p:sp>
         <p:nvSpPr>
-          <p:cNvPr id="14" name="Shape 12"/>
-          <p:cNvSpPr/>
-          <p:nvPr/>
-        </p:nvSpPr>
-        <p:spPr>
-          <a:xfrm>
-            <a:off x="5943600" y="2029968"/>
+          <p:cNvPr id="24" name="Text 22"/>
+          <p:cNvSpPr/>
+          <p:nvPr/>
+        </p:nvSpPr>
+        <p:spPr>
+          <a:xfrm>
+            <a:off x="1325880" y="3346704"/>
+            <a:ext cx="2377440" cy="502920"/>
+          </a:xfrm>
+          <a:prstGeom prst="rect">
+            <a:avLst/>
+          </a:prstGeom>
+          <a:noFill/>
+          <a:ln/>
+        </p:spPr>
+        <p:txBody>
+          <a:bodyPr wrap="square" rtlCol="0" anchor="ctr"/>
+          <a:lstStyle/>
+          <a:p>
+            <a:pPr marL="0" indent="0">
+              <a:buNone/>
+            </a:pPr>
+            <a:r>
+              <a:rPr lang="en-US" sz="1300" b="1" dirty="0">
+                <a:solidFill>
+                  <a:srgbClr val="1E293B"/>
+                </a:solidFill>
+                <a:latin typeface="Calibri" pitchFamily="34" charset="0"/>
+                <a:ea typeface="Calibri" pitchFamily="34" charset="-122"/>
+                <a:cs typeface="Calibri" pitchFamily="34" charset="-120"/>
+              </a:rPr>
+              <a:t>Data Control Language</a:t>
+            </a:r>
+            <a:endParaRPr lang="en-US" sz="1300" dirty="0"/>
+          </a:p>
+        </p:txBody>
+      </p:sp>
+      <p:sp>
+        <p:nvSpPr>
+          <p:cNvPr id="25" name="Text 23"/>
+          <p:cNvSpPr/>
+          <p:nvPr/>
+        </p:nvSpPr>
+        <p:spPr>
+          <a:xfrm>
+            <a:off x="3749040" y="3346704"/>
+            <a:ext cx="2103120" cy="502920"/>
+          </a:xfrm>
+          <a:prstGeom prst="rect">
+            <a:avLst/>
+          </a:prstGeom>
+          <a:noFill/>
+          <a:ln/>
+        </p:spPr>
+        <p:txBody>
+          <a:bodyPr wrap="square" rtlCol="0" anchor="ctr"/>
+          <a:lstStyle/>
+          <a:p>
+            <a:r>
+              <a:rPr lang="en-US" sz="1200" dirty="0">
+                <a:solidFill>
+                  <a:schemeClr val="tx1">
+                    <a:lumMod val="65000"/>
+                    <a:lumOff val="35000"/>
+                  </a:schemeClr>
+                </a:solidFill>
+              </a:rPr>
+              <a:t>Control who can </a:t>
+            </a:r>
+            <a:r>
+              <a:rPr lang="en-US" sz="1200">
+                <a:solidFill>
+                  <a:schemeClr val="tx1">
+                    <a:lumMod val="65000"/>
+                    <a:lumOff val="35000"/>
+                  </a:schemeClr>
+                </a:solidFill>
+              </a:rPr>
+              <a:t>do what: </a:t>
+            </a:r>
+            <a:r>
+              <a:rPr lang="en-US" sz="1200" dirty="0">
+                <a:solidFill>
+                  <a:schemeClr val="tx1">
+                    <a:lumMod val="65000"/>
+                    <a:lumOff val="35000"/>
+                  </a:schemeClr>
+                </a:solidFill>
+              </a:rPr>
+              <a:t>permissions</a:t>
+            </a:r>
+          </a:p>
+        </p:txBody>
+      </p:sp>
+      <p:sp>
+        <p:nvSpPr>
+          <p:cNvPr id="26" name="Shape 24"/>
+          <p:cNvSpPr/>
+          <p:nvPr/>
+        </p:nvSpPr>
+        <p:spPr>
+          <a:xfrm>
+            <a:off x="5943600" y="3346704"/>
             <a:ext cx="2743200" cy="502920"/>
           </a:xfrm>
           <a:prstGeom prst="rect">
@@ -41797,13 +42273,13 @@
       </p:sp>
       <p:sp>
         <p:nvSpPr>
-          <p:cNvPr id="15" name="Text 13"/>
-          <p:cNvSpPr/>
-          <p:nvPr/>
-        </p:nvSpPr>
-        <p:spPr>
-          <a:xfrm>
-            <a:off x="6035040" y="2029968"/>
+          <p:cNvPr id="27" name="Text 25"/>
+          <p:cNvSpPr/>
+          <p:nvPr/>
+        </p:nvSpPr>
+        <p:spPr>
+          <a:xfrm>
+            <a:off x="6035040" y="3346704"/>
             <a:ext cx="2560320" cy="502920"/>
           </a:xfrm>
           <a:prstGeom prst="rect">
@@ -41828,7 +42304,7 @@
                 <a:ea typeface="Consolas" pitchFamily="34" charset="-122"/>
                 <a:cs typeface="Consolas" pitchFamily="34" charset="-120"/>
               </a:rPr>
-              <a:t>INSERT, UPDATE, DELETE</a:t>
+              <a:t>GRANT, REVOKE</a:t>
             </a:r>
             <a:endParaRPr lang="en-US" sz="1100" dirty="0"/>
           </a:p>
@@ -41836,20 +42312,20 @@
       </p:sp>
       <p:sp>
         <p:nvSpPr>
-          <p:cNvPr id="16" name="Shape 14"/>
-          <p:cNvSpPr/>
-          <p:nvPr/>
-        </p:nvSpPr>
-        <p:spPr>
-          <a:xfrm>
-            <a:off x="457200" y="2688336"/>
+          <p:cNvPr id="28" name="Shape 26"/>
+          <p:cNvSpPr/>
+          <p:nvPr/>
+        </p:nvSpPr>
+        <p:spPr>
+          <a:xfrm>
+            <a:off x="457200" y="4005072"/>
             <a:ext cx="731520" cy="502920"/>
           </a:xfrm>
           <a:prstGeom prst="rect">
             <a:avLst/>
           </a:prstGeom>
           <a:solidFill>
-            <a:srgbClr val="EA580C"/>
+            <a:srgbClr val="0D9488"/>
           </a:solidFill>
           <a:ln/>
         </p:spPr>
@@ -41863,13 +42339,13 @@
       </p:sp>
       <p:sp>
         <p:nvSpPr>
-          <p:cNvPr id="17" name="Text 15"/>
-          <p:cNvSpPr/>
-          <p:nvPr/>
-        </p:nvSpPr>
-        <p:spPr>
-          <a:xfrm>
-            <a:off x="457200" y="2688336"/>
+          <p:cNvPr id="29" name="Text 27"/>
+          <p:cNvSpPr/>
+          <p:nvPr/>
+        </p:nvSpPr>
+        <p:spPr>
+          <a:xfrm>
+            <a:off x="457200" y="4005072"/>
             <a:ext cx="731520" cy="502920"/>
           </a:xfrm>
           <a:prstGeom prst="rect">
@@ -41894,7 +42370,7 @@
                 <a:ea typeface="Calibri" pitchFamily="34" charset="-122"/>
                 <a:cs typeface="Calibri" pitchFamily="34" charset="-120"/>
               </a:rPr>
-              <a:t>DDL</a:t>
+              <a:t>TCL</a:t>
             </a:r>
             <a:endParaRPr lang="en-US" sz="1200" dirty="0"/>
           </a:p>
@@ -41902,13 +42378,13 @@
       </p:sp>
       <p:sp>
         <p:nvSpPr>
-          <p:cNvPr id="18" name="Text 16"/>
-          <p:cNvSpPr/>
-          <p:nvPr/>
-        </p:nvSpPr>
-        <p:spPr>
-          <a:xfrm>
-            <a:off x="1325880" y="2688336"/>
+          <p:cNvPr id="30" name="Text 28"/>
+          <p:cNvSpPr/>
+          <p:nvPr/>
+        </p:nvSpPr>
+        <p:spPr>
+          <a:xfrm>
+            <a:off x="1325880" y="4005072"/>
             <a:ext cx="2377440" cy="502920"/>
           </a:xfrm>
           <a:prstGeom prst="rect">
@@ -41933,7 +42409,7 @@
                 <a:ea typeface="Calibri" pitchFamily="34" charset="-122"/>
                 <a:cs typeface="Calibri" pitchFamily="34" charset="-120"/>
               </a:rPr>
-              <a:t>Data Definition Language</a:t>
+              <a:t>Transaction Control Language</a:t>
             </a:r>
             <a:endParaRPr lang="en-US" sz="1300" dirty="0"/>
           </a:p>
@@ -41941,13 +42417,13 @@
       </p:sp>
       <p:sp>
         <p:nvSpPr>
-          <p:cNvPr id="19" name="Text 17"/>
-          <p:cNvSpPr/>
-          <p:nvPr/>
-        </p:nvSpPr>
-        <p:spPr>
-          <a:xfrm>
-            <a:off x="3749040" y="2688336"/>
+          <p:cNvPr id="31" name="Text 29"/>
+          <p:cNvSpPr/>
+          <p:nvPr/>
+        </p:nvSpPr>
+        <p:spPr>
+          <a:xfrm>
+            <a:off x="3749040" y="4005072"/>
             <a:ext cx="2103120" cy="502920"/>
           </a:xfrm>
           <a:prstGeom prst="rect">
@@ -41960,33 +42436,29 @@
           <a:bodyPr wrap="square" rtlCol="0" anchor="ctr"/>
           <a:lstStyle/>
           <a:p>
-            <a:pPr marL="0" indent="0">
-              <a:buNone/>
-            </a:pPr>
             <a:r>
               <a:rPr lang="en-US" sz="1200" dirty="0">
                 <a:solidFill>
-                  <a:srgbClr val="334155"/>
-                </a:solidFill>
-                <a:latin typeface="Calibri" pitchFamily="34" charset="0"/>
-                <a:ea typeface="Calibri" pitchFamily="34" charset="-122"/>
-                <a:cs typeface="Calibri" pitchFamily="34" charset="-120"/>
-              </a:rPr>
-              <a:t>Create &amp; modify structure</a:t>
-            </a:r>
-            <a:endParaRPr lang="en-US" sz="1200" dirty="0"/>
-          </a:p>
-        </p:txBody>
-      </p:sp>
-      <p:sp>
-        <p:nvSpPr>
-          <p:cNvPr id="20" name="Shape 18"/>
-          <p:cNvSpPr/>
-          <p:nvPr/>
-        </p:nvSpPr>
-        <p:spPr>
-          <a:xfrm>
-            <a:off x="5943600" y="2688336"/>
+                  <a:schemeClr val="tx1">
+                    <a:lumMod val="65000"/>
+                    <a:lumOff val="35000"/>
+                  </a:schemeClr>
+                </a:solidFill>
+              </a:rPr>
+              <a:t>Save or undo your work</a:t>
+            </a:r>
+          </a:p>
+        </p:txBody>
+      </p:sp>
+      <p:sp>
+        <p:nvSpPr>
+          <p:cNvPr id="32" name="Shape 30"/>
+          <p:cNvSpPr/>
+          <p:nvPr/>
+        </p:nvSpPr>
+        <p:spPr>
+          <a:xfrm>
+            <a:off x="5943600" y="4005072"/>
             <a:ext cx="2743200" cy="502920"/>
           </a:xfrm>
           <a:prstGeom prst="rect">
@@ -42007,13 +42479,13 @@
       </p:sp>
       <p:sp>
         <p:nvSpPr>
-          <p:cNvPr id="21" name="Text 19"/>
-          <p:cNvSpPr/>
-          <p:nvPr/>
-        </p:nvSpPr>
-        <p:spPr>
-          <a:xfrm>
-            <a:off x="6035040" y="2688336"/>
+          <p:cNvPr id="33" name="Text 31"/>
+          <p:cNvSpPr/>
+          <p:nvPr/>
+        </p:nvSpPr>
+        <p:spPr>
+          <a:xfrm>
+            <a:off x="6035040" y="4005072"/>
             <a:ext cx="2560320" cy="502920"/>
           </a:xfrm>
           <a:prstGeom prst="rect">
@@ -42038,456 +42510,9 @@
                 <a:ea typeface="Consolas" pitchFamily="34" charset="-122"/>
                 <a:cs typeface="Consolas" pitchFamily="34" charset="-120"/>
               </a:rPr>
-              <a:t>CREATE, ALTER, DROP, TRUNCATE</a:t>
+              <a:t>COMMIT, ROLLBACK, SAVEPOINT</a:t>
             </a:r>
             <a:endParaRPr lang="en-US" sz="1100" dirty="0"/>
-          </a:p>
-        </p:txBody>
-      </p:sp>
-      <p:sp>
-        <p:nvSpPr>
-          <p:cNvPr id="22" name="Shape 20"/>
-          <p:cNvSpPr/>
-          <p:nvPr/>
-        </p:nvSpPr>
-        <p:spPr>
-          <a:xfrm>
-            <a:off x="457200" y="3346704"/>
-            <a:ext cx="731520" cy="502920"/>
-          </a:xfrm>
-          <a:prstGeom prst="rect">
-            <a:avLst/>
-          </a:prstGeom>
-          <a:solidFill>
-            <a:srgbClr val="7C3AED"/>
-          </a:solidFill>
-          <a:ln/>
-        </p:spPr>
-        <p:txBody>
-          <a:bodyPr/>
-          <a:lstStyle/>
-          <a:p>
-            <a:endParaRPr lang="en-US"/>
-          </a:p>
-        </p:txBody>
-      </p:sp>
-      <p:sp>
-        <p:nvSpPr>
-          <p:cNvPr id="23" name="Text 21"/>
-          <p:cNvSpPr/>
-          <p:nvPr/>
-        </p:nvSpPr>
-        <p:spPr>
-          <a:xfrm>
-            <a:off x="457200" y="3346704"/>
-            <a:ext cx="731520" cy="502920"/>
-          </a:xfrm>
-          <a:prstGeom prst="rect">
-            <a:avLst/>
-          </a:prstGeom>
-          <a:noFill/>
-          <a:ln/>
-        </p:spPr>
-        <p:txBody>
-          <a:bodyPr wrap="square" rtlCol="0" anchor="ctr"/>
-          <a:lstStyle/>
-          <a:p>
-            <a:pPr marL="0" indent="0" algn="ctr">
-              <a:buNone/>
-            </a:pPr>
-            <a:r>
-              <a:rPr lang="en-US" sz="1200" b="1" dirty="0">
-                <a:solidFill>
-                  <a:srgbClr val="FFFFFF"/>
-                </a:solidFill>
-                <a:latin typeface="Calibri" pitchFamily="34" charset="0"/>
-                <a:ea typeface="Calibri" pitchFamily="34" charset="-122"/>
-                <a:cs typeface="Calibri" pitchFamily="34" charset="-120"/>
-              </a:rPr>
-              <a:t>DCL</a:t>
-            </a:r>
-            <a:endParaRPr lang="en-US" sz="1200" dirty="0"/>
-          </a:p>
-        </p:txBody>
-      </p:sp>
-      <p:sp>
-        <p:nvSpPr>
-          <p:cNvPr id="24" name="Text 22"/>
-          <p:cNvSpPr/>
-          <p:nvPr/>
-        </p:nvSpPr>
-        <p:spPr>
-          <a:xfrm>
-            <a:off x="1325880" y="3346704"/>
-            <a:ext cx="2377440" cy="502920"/>
-          </a:xfrm>
-          <a:prstGeom prst="rect">
-            <a:avLst/>
-          </a:prstGeom>
-          <a:noFill/>
-          <a:ln/>
-        </p:spPr>
-        <p:txBody>
-          <a:bodyPr wrap="square" rtlCol="0" anchor="ctr"/>
-          <a:lstStyle/>
-          <a:p>
-            <a:pPr marL="0" indent="0">
-              <a:buNone/>
-            </a:pPr>
-            <a:r>
-              <a:rPr lang="en-US" sz="1300" b="1" dirty="0">
-                <a:solidFill>
-                  <a:srgbClr val="1E293B"/>
-                </a:solidFill>
-                <a:latin typeface="Calibri" pitchFamily="34" charset="0"/>
-                <a:ea typeface="Calibri" pitchFamily="34" charset="-122"/>
-                <a:cs typeface="Calibri" pitchFamily="34" charset="-120"/>
-              </a:rPr>
-              <a:t>Data Control Language</a:t>
-            </a:r>
-            <a:endParaRPr lang="en-US" sz="1300" dirty="0"/>
-          </a:p>
-        </p:txBody>
-      </p:sp>
-      <p:sp>
-        <p:nvSpPr>
-          <p:cNvPr id="25" name="Text 23"/>
-          <p:cNvSpPr/>
-          <p:nvPr/>
-        </p:nvSpPr>
-        <p:spPr>
-          <a:xfrm>
-            <a:off x="3749040" y="3346704"/>
-            <a:ext cx="2103120" cy="502920"/>
-          </a:xfrm>
-          <a:prstGeom prst="rect">
-            <a:avLst/>
-          </a:prstGeom>
-          <a:noFill/>
-          <a:ln/>
-        </p:spPr>
-        <p:txBody>
-          <a:bodyPr wrap="square" rtlCol="0" anchor="ctr"/>
-          <a:lstStyle/>
-          <a:p>
-            <a:pPr marL="0" indent="0">
-              <a:buNone/>
-            </a:pPr>
-            <a:r>
-              <a:rPr lang="en-US" sz="1200" dirty="0">
-                <a:solidFill>
-                  <a:srgbClr val="334155"/>
-                </a:solidFill>
-                <a:latin typeface="Calibri" pitchFamily="34" charset="0"/>
-                <a:ea typeface="Calibri" pitchFamily="34" charset="-122"/>
-                <a:cs typeface="Calibri" pitchFamily="34" charset="-120"/>
-              </a:rPr>
-              <a:t>Control access &amp; permissions</a:t>
-            </a:r>
-            <a:endParaRPr lang="en-US" sz="1200" dirty="0"/>
-          </a:p>
-        </p:txBody>
-      </p:sp>
-      <p:sp>
-        <p:nvSpPr>
-          <p:cNvPr id="26" name="Shape 24"/>
-          <p:cNvSpPr/>
-          <p:nvPr/>
-        </p:nvSpPr>
-        <p:spPr>
-          <a:xfrm>
-            <a:off x="5943600" y="3346704"/>
-            <a:ext cx="2743200" cy="502920"/>
-          </a:xfrm>
-          <a:prstGeom prst="rect">
-            <a:avLst/>
-          </a:prstGeom>
-          <a:solidFill>
-            <a:srgbClr val="F8FAFC"/>
-          </a:solidFill>
-          <a:ln/>
-        </p:spPr>
-        <p:txBody>
-          <a:bodyPr/>
-          <a:lstStyle/>
-          <a:p>
-            <a:endParaRPr lang="en-US"/>
-          </a:p>
-        </p:txBody>
-      </p:sp>
-      <p:sp>
-        <p:nvSpPr>
-          <p:cNvPr id="27" name="Text 25"/>
-          <p:cNvSpPr/>
-          <p:nvPr/>
-        </p:nvSpPr>
-        <p:spPr>
-          <a:xfrm>
-            <a:off x="6035040" y="3346704"/>
-            <a:ext cx="2560320" cy="502920"/>
-          </a:xfrm>
-          <a:prstGeom prst="rect">
-            <a:avLst/>
-          </a:prstGeom>
-          <a:noFill/>
-          <a:ln/>
-        </p:spPr>
-        <p:txBody>
-          <a:bodyPr wrap="square" rtlCol="0" anchor="ctr"/>
-          <a:lstStyle/>
-          <a:p>
-            <a:pPr marL="0" indent="0">
-              <a:buNone/>
-            </a:pPr>
-            <a:r>
-              <a:rPr lang="en-US" sz="1100" dirty="0">
-                <a:solidFill>
-                  <a:srgbClr val="334155"/>
-                </a:solidFill>
-                <a:latin typeface="Consolas" pitchFamily="34" charset="0"/>
-                <a:ea typeface="Consolas" pitchFamily="34" charset="-122"/>
-                <a:cs typeface="Consolas" pitchFamily="34" charset="-120"/>
-              </a:rPr>
-              <a:t>GRANT, REVOKE</a:t>
-            </a:r>
-            <a:endParaRPr lang="en-US" sz="1100" dirty="0"/>
-          </a:p>
-        </p:txBody>
-      </p:sp>
-      <p:sp>
-        <p:nvSpPr>
-          <p:cNvPr id="28" name="Shape 26"/>
-          <p:cNvSpPr/>
-          <p:nvPr/>
-        </p:nvSpPr>
-        <p:spPr>
-          <a:xfrm>
-            <a:off x="457200" y="4005072"/>
-            <a:ext cx="731520" cy="502920"/>
-          </a:xfrm>
-          <a:prstGeom prst="rect">
-            <a:avLst/>
-          </a:prstGeom>
-          <a:solidFill>
-            <a:srgbClr val="0D9488"/>
-          </a:solidFill>
-          <a:ln/>
-        </p:spPr>
-        <p:txBody>
-          <a:bodyPr/>
-          <a:lstStyle/>
-          <a:p>
-            <a:endParaRPr lang="en-US"/>
-          </a:p>
-        </p:txBody>
-      </p:sp>
-      <p:sp>
-        <p:nvSpPr>
-          <p:cNvPr id="29" name="Text 27"/>
-          <p:cNvSpPr/>
-          <p:nvPr/>
-        </p:nvSpPr>
-        <p:spPr>
-          <a:xfrm>
-            <a:off x="457200" y="4005072"/>
-            <a:ext cx="731520" cy="502920"/>
-          </a:xfrm>
-          <a:prstGeom prst="rect">
-            <a:avLst/>
-          </a:prstGeom>
-          <a:noFill/>
-          <a:ln/>
-        </p:spPr>
-        <p:txBody>
-          <a:bodyPr wrap="square" rtlCol="0" anchor="ctr"/>
-          <a:lstStyle/>
-          <a:p>
-            <a:pPr marL="0" indent="0" algn="ctr">
-              <a:buNone/>
-            </a:pPr>
-            <a:r>
-              <a:rPr lang="en-US" sz="1200" b="1" dirty="0">
-                <a:solidFill>
-                  <a:srgbClr val="FFFFFF"/>
-                </a:solidFill>
-                <a:latin typeface="Calibri" pitchFamily="34" charset="0"/>
-                <a:ea typeface="Calibri" pitchFamily="34" charset="-122"/>
-                <a:cs typeface="Calibri" pitchFamily="34" charset="-120"/>
-              </a:rPr>
-              <a:t>TCL</a:t>
-            </a:r>
-            <a:endParaRPr lang="en-US" sz="1200" dirty="0"/>
-          </a:p>
-        </p:txBody>
-      </p:sp>
-      <p:sp>
-        <p:nvSpPr>
-          <p:cNvPr id="30" name="Text 28"/>
-          <p:cNvSpPr/>
-          <p:nvPr/>
-        </p:nvSpPr>
-        <p:spPr>
-          <a:xfrm>
-            <a:off x="1325880" y="4005072"/>
-            <a:ext cx="2377440" cy="502920"/>
-          </a:xfrm>
-          <a:prstGeom prst="rect">
-            <a:avLst/>
-          </a:prstGeom>
-          <a:noFill/>
-          <a:ln/>
-        </p:spPr>
-        <p:txBody>
-          <a:bodyPr wrap="square" rtlCol="0" anchor="ctr"/>
-          <a:lstStyle/>
-          <a:p>
-            <a:pPr marL="0" indent="0">
-              <a:buNone/>
-            </a:pPr>
-            <a:r>
-              <a:rPr lang="en-US" sz="1300" b="1" dirty="0">
-                <a:solidFill>
-                  <a:srgbClr val="1E293B"/>
-                </a:solidFill>
-                <a:latin typeface="Calibri" pitchFamily="34" charset="0"/>
-                <a:ea typeface="Calibri" pitchFamily="34" charset="-122"/>
-                <a:cs typeface="Calibri" pitchFamily="34" charset="-120"/>
-              </a:rPr>
-              <a:t>Transaction Control Language</a:t>
-            </a:r>
-            <a:endParaRPr lang="en-US" sz="1300" dirty="0"/>
-          </a:p>
-        </p:txBody>
-      </p:sp>
-      <p:sp>
-        <p:nvSpPr>
-          <p:cNvPr id="31" name="Text 29"/>
-          <p:cNvSpPr/>
-          <p:nvPr/>
-        </p:nvSpPr>
-        <p:spPr>
-          <a:xfrm>
-            <a:off x="3749040" y="4005072"/>
-            <a:ext cx="2103120" cy="502920"/>
-          </a:xfrm>
-          <a:prstGeom prst="rect">
-            <a:avLst/>
-          </a:prstGeom>
-          <a:noFill/>
-          <a:ln/>
-        </p:spPr>
-        <p:txBody>
-          <a:bodyPr wrap="square" rtlCol="0" anchor="ctr"/>
-          <a:lstStyle/>
-          <a:p>
-            <a:pPr marL="0" indent="0">
-              <a:buNone/>
-            </a:pPr>
-            <a:r>
-              <a:rPr lang="en-US" sz="1200" dirty="0">
-                <a:solidFill>
-                  <a:srgbClr val="334155"/>
-                </a:solidFill>
-                <a:latin typeface="Calibri" pitchFamily="34" charset="0"/>
-                <a:ea typeface="Calibri" pitchFamily="34" charset="-122"/>
-                <a:cs typeface="Calibri" pitchFamily="34" charset="-120"/>
-              </a:rPr>
-              <a:t>Manage transactions</a:t>
-            </a:r>
-            <a:endParaRPr lang="en-US" sz="1200" dirty="0"/>
-          </a:p>
-        </p:txBody>
-      </p:sp>
-      <p:sp>
-        <p:nvSpPr>
-          <p:cNvPr id="32" name="Shape 30"/>
-          <p:cNvSpPr/>
-          <p:nvPr/>
-        </p:nvSpPr>
-        <p:spPr>
-          <a:xfrm>
-            <a:off x="5943600" y="4005072"/>
-            <a:ext cx="2743200" cy="502920"/>
-          </a:xfrm>
-          <a:prstGeom prst="rect">
-            <a:avLst/>
-          </a:prstGeom>
-          <a:solidFill>
-            <a:srgbClr val="F8FAFC"/>
-          </a:solidFill>
-          <a:ln/>
-        </p:spPr>
-        <p:txBody>
-          <a:bodyPr/>
-          <a:lstStyle/>
-          <a:p>
-            <a:endParaRPr lang="en-US"/>
-          </a:p>
-        </p:txBody>
-      </p:sp>
-      <p:sp>
-        <p:nvSpPr>
-          <p:cNvPr id="33" name="Text 31"/>
-          <p:cNvSpPr/>
-          <p:nvPr/>
-        </p:nvSpPr>
-        <p:spPr>
-          <a:xfrm>
-            <a:off x="6035040" y="4005072"/>
-            <a:ext cx="2560320" cy="502920"/>
-          </a:xfrm>
-          <a:prstGeom prst="rect">
-            <a:avLst/>
-          </a:prstGeom>
-          <a:noFill/>
-          <a:ln/>
-        </p:spPr>
-        <p:txBody>
-          <a:bodyPr wrap="square" rtlCol="0" anchor="ctr"/>
-          <a:lstStyle/>
-          <a:p>
-            <a:pPr marL="0" indent="0">
-              <a:buNone/>
-            </a:pPr>
-            <a:r>
-              <a:rPr lang="en-US" sz="1100" dirty="0">
-                <a:solidFill>
-                  <a:srgbClr val="334155"/>
-                </a:solidFill>
-                <a:latin typeface="Consolas" pitchFamily="34" charset="0"/>
-                <a:ea typeface="Consolas" pitchFamily="34" charset="-122"/>
-                <a:cs typeface="Consolas" pitchFamily="34" charset="-120"/>
-              </a:rPr>
-              <a:t>COMMIT, ROLLBACK, SAVEPOINT</a:t>
-            </a:r>
-            <a:endParaRPr lang="en-US" sz="1100" dirty="0"/>
-          </a:p>
-        </p:txBody>
-      </p:sp>
-      <p:sp>
-        <p:nvSpPr>
-          <p:cNvPr id="34" name="Shape 32"/>
-          <p:cNvSpPr/>
-          <p:nvPr/>
-        </p:nvSpPr>
-        <p:spPr>
-          <a:xfrm>
-            <a:off x="457200" y="4572000"/>
-            <a:ext cx="8229600" cy="457200"/>
-          </a:xfrm>
-          <a:prstGeom prst="rect">
-            <a:avLst/>
-          </a:prstGeom>
-          <a:solidFill>
-            <a:srgbClr val="F8FAFC"/>
-          </a:solidFill>
-          <a:ln/>
-        </p:spPr>
-        <p:txBody>
-          <a:bodyPr/>
-          <a:lstStyle/>
-          <a:p>
-            <a:endParaRPr lang="en-US"/>
           </a:p>
         </p:txBody>
       </p:sp>
@@ -42515,17 +42540,6 @@
             <a:pPr marL="0" indent="0">
               <a:buNone/>
             </a:pPr>
-            <a:r>
-              <a:rPr lang="en-US" sz="1200" dirty="0">
-                <a:solidFill>
-                  <a:srgbClr val="334155"/>
-                </a:solidFill>
-                <a:latin typeface="Calibri" pitchFamily="34" charset="0"/>
-                <a:ea typeface="Calibri" pitchFamily="34" charset="-122"/>
-                <a:cs typeface="Calibri" pitchFamily="34" charset="-120"/>
-              </a:rPr>
-              <a:t>In this course, we focus mainly on DQL (SELECT) and basic DML commands for data analysis.</a:t>
-            </a:r>
             <a:endParaRPr lang="en-US" sz="1200" dirty="0"/>
           </a:p>
         </p:txBody>
